--- a/contents/Module-09-Monitoring-and-Performance-Basics.pptx
+++ b/contents/Module-09-Monitoring-and-Performance-Basics.pptx
@@ -4955,7 +4955,7 @@
         </p:nvSpPr>
         <p:spPr>
           <a:xfrm>
-            <a:off x="411480" y="6446520"/>
+            <a:off x="411480" y="6144768"/>
             <a:ext cx="11384280" cy="256032"/>
           </a:xfrm>
           <a:prstGeom prst="rect">
@@ -8930,7 +8930,7 @@
         <p:spPr>
           <a:xfrm>
             <a:off x="640080" y="2788920"/>
-            <a:ext cx="256032" cy="256032"/>
+            <a:ext cx="347472" cy="256032"/>
           </a:xfrm>
           <a:prstGeom prst="rect">
             <a:avLst/>
@@ -8973,7 +8973,7 @@
         <p:spPr>
           <a:xfrm>
             <a:off x="640080" y="2807208"/>
-            <a:ext cx="256032" cy="219456"/>
+            <a:ext cx="347472" cy="219456"/>
           </a:xfrm>
           <a:prstGeom prst="rect">
             <a:avLst/>
@@ -9007,8 +9007,8 @@
         </p:nvSpPr>
         <p:spPr>
           <a:xfrm>
-            <a:off x="1024128" y="2779776"/>
-            <a:ext cx="6236208" cy="310896"/>
+            <a:off x="1115568" y="2779776"/>
+            <a:ext cx="6144768" cy="310896"/>
           </a:xfrm>
           <a:prstGeom prst="rect">
             <a:avLst/>
@@ -9043,7 +9043,7 @@
         <p:spPr>
           <a:xfrm>
             <a:off x="640080" y="3163824"/>
-            <a:ext cx="256032" cy="256032"/>
+            <a:ext cx="347472" cy="256032"/>
           </a:xfrm>
           <a:prstGeom prst="rect">
             <a:avLst/>
@@ -9086,7 +9086,7 @@
         <p:spPr>
           <a:xfrm>
             <a:off x="640080" y="3182112"/>
-            <a:ext cx="256032" cy="219456"/>
+            <a:ext cx="347472" cy="219456"/>
           </a:xfrm>
           <a:prstGeom prst="rect">
             <a:avLst/>
@@ -9120,8 +9120,8 @@
         </p:nvSpPr>
         <p:spPr>
           <a:xfrm>
-            <a:off x="1024128" y="3154680"/>
-            <a:ext cx="6236208" cy="310896"/>
+            <a:off x="1115568" y="3154680"/>
+            <a:ext cx="6144768" cy="310896"/>
           </a:xfrm>
           <a:prstGeom prst="rect">
             <a:avLst/>
@@ -9156,7 +9156,7 @@
         <p:spPr>
           <a:xfrm>
             <a:off x="640080" y="3538728"/>
-            <a:ext cx="256032" cy="256032"/>
+            <a:ext cx="347472" cy="256032"/>
           </a:xfrm>
           <a:prstGeom prst="rect">
             <a:avLst/>
@@ -9199,7 +9199,7 @@
         <p:spPr>
           <a:xfrm>
             <a:off x="640080" y="3557016"/>
-            <a:ext cx="256032" cy="219456"/>
+            <a:ext cx="347472" cy="219456"/>
           </a:xfrm>
           <a:prstGeom prst="rect">
             <a:avLst/>
@@ -9233,8 +9233,8 @@
         </p:nvSpPr>
         <p:spPr>
           <a:xfrm>
-            <a:off x="1024128" y="3529584"/>
-            <a:ext cx="6236208" cy="310896"/>
+            <a:off x="1115568" y="3529584"/>
+            <a:ext cx="6144768" cy="310896"/>
           </a:xfrm>
           <a:prstGeom prst="rect">
             <a:avLst/>
@@ -9269,7 +9269,7 @@
         <p:spPr>
           <a:xfrm>
             <a:off x="640080" y="3913632"/>
-            <a:ext cx="256032" cy="256032"/>
+            <a:ext cx="347472" cy="256032"/>
           </a:xfrm>
           <a:prstGeom prst="rect">
             <a:avLst/>
@@ -9312,7 +9312,7 @@
         <p:spPr>
           <a:xfrm>
             <a:off x="640080" y="3931920"/>
-            <a:ext cx="256032" cy="219456"/>
+            <a:ext cx="347472" cy="219456"/>
           </a:xfrm>
           <a:prstGeom prst="rect">
             <a:avLst/>
@@ -9346,8 +9346,8 @@
         </p:nvSpPr>
         <p:spPr>
           <a:xfrm>
-            <a:off x="1024128" y="3904488"/>
-            <a:ext cx="6236208" cy="310896"/>
+            <a:off x="1115568" y="3904488"/>
+            <a:ext cx="6144768" cy="310896"/>
           </a:xfrm>
           <a:prstGeom prst="rect">
             <a:avLst/>
@@ -9382,7 +9382,7 @@
         <p:spPr>
           <a:xfrm>
             <a:off x="640080" y="4288536"/>
-            <a:ext cx="256032" cy="256032"/>
+            <a:ext cx="347472" cy="256032"/>
           </a:xfrm>
           <a:prstGeom prst="rect">
             <a:avLst/>
@@ -9425,7 +9425,7 @@
         <p:spPr>
           <a:xfrm>
             <a:off x="640080" y="4306824"/>
-            <a:ext cx="256032" cy="219456"/>
+            <a:ext cx="347472" cy="219456"/>
           </a:xfrm>
           <a:prstGeom prst="rect">
             <a:avLst/>
@@ -9459,8 +9459,8 @@
         </p:nvSpPr>
         <p:spPr>
           <a:xfrm>
-            <a:off x="1024128" y="4279392"/>
-            <a:ext cx="6236208" cy="310896"/>
+            <a:off x="1115568" y="4279392"/>
+            <a:ext cx="6144768" cy="310896"/>
           </a:xfrm>
           <a:prstGeom prst="rect">
             <a:avLst/>
@@ -9495,7 +9495,7 @@
         <p:spPr>
           <a:xfrm>
             <a:off x="640080" y="4663440"/>
-            <a:ext cx="256032" cy="256032"/>
+            <a:ext cx="347472" cy="256032"/>
           </a:xfrm>
           <a:prstGeom prst="rect">
             <a:avLst/>
@@ -9538,7 +9538,7 @@
         <p:spPr>
           <a:xfrm>
             <a:off x="640080" y="4681728"/>
-            <a:ext cx="256032" cy="219456"/>
+            <a:ext cx="347472" cy="219456"/>
           </a:xfrm>
           <a:prstGeom prst="rect">
             <a:avLst/>
@@ -9572,8 +9572,8 @@
         </p:nvSpPr>
         <p:spPr>
           <a:xfrm>
-            <a:off x="1024128" y="4654296"/>
-            <a:ext cx="6236208" cy="310896"/>
+            <a:off x="1115568" y="4654296"/>
+            <a:ext cx="6144768" cy="310896"/>
           </a:xfrm>
           <a:prstGeom prst="rect">
             <a:avLst/>
@@ -9608,7 +9608,7 @@
         <p:spPr>
           <a:xfrm>
             <a:off x="640080" y="5038344"/>
-            <a:ext cx="256032" cy="256032"/>
+            <a:ext cx="347472" cy="256032"/>
           </a:xfrm>
           <a:prstGeom prst="rect">
             <a:avLst/>
@@ -9651,7 +9651,7 @@
         <p:spPr>
           <a:xfrm>
             <a:off x="640080" y="5056632"/>
-            <a:ext cx="256032" cy="219456"/>
+            <a:ext cx="347472" cy="219456"/>
           </a:xfrm>
           <a:prstGeom prst="rect">
             <a:avLst/>
@@ -9685,8 +9685,8 @@
         </p:nvSpPr>
         <p:spPr>
           <a:xfrm>
-            <a:off x="1024128" y="5029200"/>
-            <a:ext cx="6236208" cy="310896"/>
+            <a:off x="1115568" y="5029200"/>
+            <a:ext cx="6144768" cy="310896"/>
           </a:xfrm>
           <a:prstGeom prst="rect">
             <a:avLst/>
@@ -9721,7 +9721,7 @@
         <p:spPr>
           <a:xfrm>
             <a:off x="640080" y="5413248"/>
-            <a:ext cx="256032" cy="256032"/>
+            <a:ext cx="347472" cy="256032"/>
           </a:xfrm>
           <a:prstGeom prst="rect">
             <a:avLst/>
@@ -9764,7 +9764,7 @@
         <p:spPr>
           <a:xfrm>
             <a:off x="640080" y="5431536"/>
-            <a:ext cx="256032" cy="219456"/>
+            <a:ext cx="347472" cy="219456"/>
           </a:xfrm>
           <a:prstGeom prst="rect">
             <a:avLst/>
@@ -9798,8 +9798,8 @@
         </p:nvSpPr>
         <p:spPr>
           <a:xfrm>
-            <a:off x="1024128" y="5404104"/>
-            <a:ext cx="6236208" cy="310896"/>
+            <a:off x="1115568" y="5404104"/>
+            <a:ext cx="6144768" cy="310896"/>
           </a:xfrm>
           <a:prstGeom prst="rect">
             <a:avLst/>
@@ -9834,7 +9834,7 @@
         <p:spPr>
           <a:xfrm>
             <a:off x="640080" y="5788152"/>
-            <a:ext cx="256032" cy="256032"/>
+            <a:ext cx="347472" cy="256032"/>
           </a:xfrm>
           <a:prstGeom prst="rect">
             <a:avLst/>
@@ -9877,7 +9877,7 @@
         <p:spPr>
           <a:xfrm>
             <a:off x="640080" y="5806440"/>
-            <a:ext cx="256032" cy="219456"/>
+            <a:ext cx="347472" cy="219456"/>
           </a:xfrm>
           <a:prstGeom prst="rect">
             <a:avLst/>
@@ -9911,8 +9911,8 @@
         </p:nvSpPr>
         <p:spPr>
           <a:xfrm>
-            <a:off x="1024128" y="5779008"/>
-            <a:ext cx="6236208" cy="310896"/>
+            <a:off x="1115568" y="5779008"/>
+            <a:ext cx="6144768" cy="310896"/>
           </a:xfrm>
           <a:prstGeom prst="rect">
             <a:avLst/>
@@ -9947,7 +9947,7 @@
         <p:spPr>
           <a:xfrm>
             <a:off x="640080" y="6163056"/>
-            <a:ext cx="256032" cy="256032"/>
+            <a:ext cx="347472" cy="256032"/>
           </a:xfrm>
           <a:prstGeom prst="rect">
             <a:avLst/>
@@ -9990,7 +9990,7 @@
         <p:spPr>
           <a:xfrm>
             <a:off x="640080" y="6181344"/>
-            <a:ext cx="256032" cy="219456"/>
+            <a:ext cx="347472" cy="219456"/>
           </a:xfrm>
           <a:prstGeom prst="rect">
             <a:avLst/>
@@ -10024,8 +10024,8 @@
         </p:nvSpPr>
         <p:spPr>
           <a:xfrm>
-            <a:off x="1024128" y="6153912"/>
-            <a:ext cx="6236208" cy="310896"/>
+            <a:off x="1115568" y="6153912"/>
+            <a:ext cx="6144768" cy="310896"/>
           </a:xfrm>
           <a:prstGeom prst="rect">
             <a:avLst/>
